--- a/material/Python/03_산술연산자,입출력.pptx
+++ b/material/Python/03_산술연산자,입출력.pptx
@@ -1,6 +1,6 @@
 
 <file path=ppt/presentation.xml><?xml version="1.0" encoding="utf-8"?>
-<p:presentation xmlns:a="http://schemas.openxmlformats.org/drawingml/2006/main" xmlns:r="http://schemas.openxmlformats.org/officeDocument/2006/relationships" xmlns:p="http://schemas.openxmlformats.org/presentationml/2006/main" saveSubsetFonts="1">
+<p:presentation xmlns:a="http://schemas.openxmlformats.org/drawingml/2006/main" xmlns:r="http://schemas.openxmlformats.org/officeDocument/2006/relationships" xmlns:p="http://schemas.openxmlformats.org/presentationml/2006/main" embedTrueTypeFonts="1" saveSubsetFonts="1">
   <p:sldMasterIdLst>
     <p:sldMasterId id="2147483660" r:id="rId1"/>
   </p:sldMasterIdLst>
@@ -45,6 +45,34 @@
   </p:sldIdLst>
   <p:sldSz cx="12192000" cy="6858000"/>
   <p:notesSz cx="6858000" cy="9144000"/>
+  <p:embeddedFontLst>
+    <p:embeddedFont>
+      <p:font typeface="G마켓 산스 TTF Bold" panose="02000000000000000000" pitchFamily="2" charset="-127"/>
+      <p:bold r:id="rId37"/>
+    </p:embeddedFont>
+    <p:embeddedFont>
+      <p:font typeface="Pretendard Black" panose="02000A03000000020004" pitchFamily="2" charset="-127"/>
+      <p:bold r:id="rId38"/>
+    </p:embeddedFont>
+    <p:embeddedFont>
+      <p:font typeface="Pretendard Light" panose="02000403000000020004" pitchFamily="2" charset="-127"/>
+      <p:regular r:id="rId39"/>
+    </p:embeddedFont>
+    <p:embeddedFont>
+      <p:font typeface="Pretendard Medium" panose="02000603000000020004" pitchFamily="2" charset="-127"/>
+      <p:regular r:id="rId40"/>
+    </p:embeddedFont>
+    <p:embeddedFont>
+      <p:font typeface="맑은 고딕" panose="020B0503020000020004" pitchFamily="50" charset="-127"/>
+      <p:regular r:id="rId41"/>
+      <p:bold r:id="rId42"/>
+    </p:embeddedFont>
+    <p:embeddedFont>
+      <p:font typeface="메이플스토리" panose="02000300000000000000" pitchFamily="2" charset="-127"/>
+      <p:regular r:id="rId43"/>
+      <p:bold r:id="rId44"/>
+    </p:embeddedFont>
+  </p:embeddedFontLst>
   <p:defaultTextStyle>
     <a:defPPr>
       <a:defRPr lang="ko-KR"/>
@@ -251,7 +279,7 @@
             <a:fld id="{A13A867C-D490-40C2-AB8D-A60FA70A9BF5}" type="datetimeFigureOut">
               <a:rPr lang="ko-KR" altLang="en-US" smtClean="0"/>
               <a:pPr/>
-              <a:t>2025-07-14</a:t>
+              <a:t>2025-08-21</a:t>
             </a:fld>
             <a:endParaRPr lang="ko-KR" altLang="en-US" dirty="0"/>
           </a:p>
@@ -1446,7 +1474,7 @@
           </a:lstStyle>
           <a:p>
             <a:r>
-              <a:rPr lang="ko-KR" altLang="en-US"/>
+              <a:rPr lang="ko-KR" altLang="en-US" dirty="0"/>
               <a:t>마스터 제목 스타일 편집</a:t>
             </a:r>
           </a:p>
@@ -1516,7 +1544,7 @@
           </a:lstStyle>
           <a:p>
             <a:r>
-              <a:rPr lang="ko-KR" altLang="en-US"/>
+              <a:rPr lang="ko-KR" altLang="en-US" dirty="0"/>
               <a:t>클릭하여 마스터 부제목 스타일 편집</a:t>
             </a:r>
           </a:p>
@@ -1545,9 +1573,9 @@
           <a:p>
             <a:fld id="{442BEE3F-2E9A-4FD8-8B8A-8619F3E161C0}" type="datetime1">
               <a:rPr lang="ko-KR" altLang="en-US" smtClean="0"/>
-              <a:t>2025-07-14</a:t>
+              <a:t>2025-08-21</a:t>
             </a:fld>
-            <a:endParaRPr lang="ko-KR" altLang="en-US"/>
+            <a:endParaRPr lang="ko-KR" altLang="en-US" dirty="0"/>
           </a:p>
         </p:txBody>
       </p:sp>
@@ -1572,7 +1600,7 @@
           <a:bodyPr/>
           <a:lstStyle/>
           <a:p>
-            <a:endParaRPr lang="ko-KR" altLang="en-US"/>
+            <a:endParaRPr lang="ko-KR" altLang="en-US" dirty="0"/>
           </a:p>
         </p:txBody>
       </p:sp>
@@ -1832,7 +1860,7 @@
           <a:p>
             <a:fld id="{0F78D9C4-20C1-4B15-A116-16DC77AD9A1E}" type="datetime1">
               <a:rPr lang="ko-KR" altLang="en-US" smtClean="0"/>
-              <a:t>2025-07-14</a:t>
+              <a:t>2025-08-21</a:t>
             </a:fld>
             <a:endParaRPr lang="ko-KR" altLang="en-US"/>
           </a:p>
@@ -1954,7 +1982,7 @@
           <a:lstStyle/>
           <a:p>
             <a:r>
-              <a:rPr lang="ko-KR" altLang="en-US"/>
+              <a:rPr lang="ko-KR" altLang="en-US" dirty="0"/>
               <a:t>마스터 제목 스타일 편집</a:t>
             </a:r>
           </a:p>
@@ -2007,7 +2035,7 @@
           <a:p>
             <a:fld id="{7F5E23C3-0E3D-4E4E-8486-D7FB4C073DC1}" type="datetime1">
               <a:rPr lang="ko-KR" altLang="en-US" smtClean="0"/>
-              <a:t>2025-07-14</a:t>
+              <a:t>2025-08-21</a:t>
             </a:fld>
             <a:endParaRPr lang="ko-KR" altLang="en-US"/>
           </a:p>
@@ -2127,10 +2155,9 @@
           </a:lstStyle>
           <a:p>
             <a:r>
-              <a:rPr lang="ko-KR" altLang="en-US"/>
+              <a:rPr lang="ko-KR" altLang="en-US" dirty="0"/>
               <a:t>마스터 제목 스타일 편집</a:t>
             </a:r>
-            <a:endParaRPr lang="ko-KR" altLang="en-US" dirty="0"/>
           </a:p>
         </p:txBody>
       </p:sp>
@@ -2157,7 +2184,7 @@
           <a:p>
             <a:fld id="{9C6F2426-F011-4048-96E6-328581C59A1B}" type="datetimeFigureOut">
               <a:rPr lang="ko-KR" altLang="en-US" smtClean="0"/>
-              <a:t>2025-07-14</a:t>
+              <a:t>2025-08-21</a:t>
             </a:fld>
             <a:endParaRPr lang="ko-KR" altLang="en-US"/>
           </a:p>
@@ -2486,7 +2513,7 @@
           <a:p>
             <a:fld id="{7F5E23C3-0E3D-4E4E-8486-D7FB4C073DC1}" type="datetime1">
               <a:rPr lang="ko-KR" altLang="en-US" smtClean="0"/>
-              <a:t>2025-07-14</a:t>
+              <a:t>2025-08-21</a:t>
             </a:fld>
             <a:endParaRPr lang="ko-KR" altLang="en-US"/>
           </a:p>
@@ -3337,7 +3364,7 @@
           <a:p>
             <a:fld id="{0F78D9C4-20C1-4B15-A116-16DC77AD9A1E}" type="datetime1">
               <a:rPr lang="ko-KR" altLang="en-US" smtClean="0"/>
-              <a:t>2025-07-14</a:t>
+              <a:t>2025-08-21</a:t>
             </a:fld>
             <a:endParaRPr lang="ko-KR" altLang="en-US"/>
           </a:p>
@@ -3545,7 +3572,7 @@
           <a:p>
             <a:fld id="{0F78D9C4-20C1-4B15-A116-16DC77AD9A1E}" type="datetime1">
               <a:rPr lang="ko-KR" altLang="en-US" smtClean="0"/>
-              <a:t>2025-07-14</a:t>
+              <a:t>2025-08-21</a:t>
             </a:fld>
             <a:endParaRPr lang="ko-KR" altLang="en-US"/>
           </a:p>
@@ -3672,7 +3699,7 @@
           <a:p>
             <a:fld id="{0F78D9C4-20C1-4B15-A116-16DC77AD9A1E}" type="datetime1">
               <a:rPr lang="ko-KR" altLang="en-US" smtClean="0"/>
-              <a:t>2025-07-14</a:t>
+              <a:t>2025-08-21</a:t>
             </a:fld>
             <a:endParaRPr lang="ko-KR" altLang="en-US"/>
           </a:p>
@@ -3830,7 +3857,7 @@
           <a:p>
             <a:fld id="{0F78D9C4-20C1-4B15-A116-16DC77AD9A1E}" type="datetime1">
               <a:rPr lang="ko-KR" altLang="en-US" smtClean="0"/>
-              <a:t>2025-07-14</a:t>
+              <a:t>2025-08-21</a:t>
             </a:fld>
             <a:endParaRPr lang="ko-KR" altLang="en-US"/>
           </a:p>
@@ -4069,7 +4096,7 @@
           <a:p>
             <a:fld id="{0F78D9C4-20C1-4B15-A116-16DC77AD9A1E}" type="datetime1">
               <a:rPr lang="ko-KR" altLang="en-US" smtClean="0"/>
-              <a:t>2025-07-14</a:t>
+              <a:t>2025-08-21</a:t>
             </a:fld>
             <a:endParaRPr lang="ko-KR" altLang="en-US"/>
           </a:p>
@@ -4323,7 +4350,7 @@
           <a:p>
             <a:fld id="{0F78D9C4-20C1-4B15-A116-16DC77AD9A1E}" type="datetime1">
               <a:rPr lang="ko-KR" altLang="en-US" smtClean="0"/>
-              <a:t>2025-07-14</a:t>
+              <a:t>2025-08-21</a:t>
             </a:fld>
             <a:endParaRPr lang="ko-KR" altLang="en-US"/>
           </a:p>
@@ -4777,7 +4804,7 @@
           <a:p>
             <a:fld id="{0F78D9C4-20C1-4B15-A116-16DC77AD9A1E}" type="datetime1">
               <a:rPr lang="ko-KR" altLang="en-US" smtClean="0"/>
-              <a:t>2025-07-14</a:t>
+              <a:t>2025-08-21</a:t>
             </a:fld>
             <a:endParaRPr lang="ko-KR" altLang="en-US"/>
           </a:p>
@@ -5110,7 +5137,7 @@
           <a:p>
             <a:fld id="{76022175-F16A-4A96-8E45-178BE9345AE9}" type="datetime6">
               <a:rPr lang="ko-KR" altLang="en-US" smtClean="0"/>
-              <a:t>2025년 7월</a:t>
+              <a:t>2025년 8월</a:t>
             </a:fld>
             <a:endParaRPr lang="ko-KR" altLang="en-US"/>
           </a:p>
@@ -5442,7 +5469,7 @@
           <a:p>
             <a:fld id="{0F78D9C4-20C1-4B15-A116-16DC77AD9A1E}" type="datetime1">
               <a:rPr lang="ko-KR" altLang="en-US" smtClean="0"/>
-              <a:t>2025-07-14</a:t>
+              <a:t>2025-08-21</a:t>
             </a:fld>
             <a:endParaRPr lang="ko-KR" altLang="en-US"/>
           </a:p>
@@ -5796,7 +5823,7 @@
           <a:p>
             <a:fld id="{0F78D9C4-20C1-4B15-A116-16DC77AD9A1E}" type="datetime1">
               <a:rPr lang="ko-KR" altLang="en-US" smtClean="0"/>
-              <a:t>2025-07-14</a:t>
+              <a:t>2025-08-21</a:t>
             </a:fld>
             <a:endParaRPr lang="ko-KR" altLang="en-US"/>
           </a:p>
@@ -6033,7 +6060,7 @@
           <a:p>
             <a:fld id="{0F78D9C4-20C1-4B15-A116-16DC77AD9A1E}" type="datetime1">
               <a:rPr lang="ko-KR" altLang="en-US" smtClean="0"/>
-              <a:t>2025-07-14</a:t>
+              <a:t>2025-08-21</a:t>
             </a:fld>
             <a:endParaRPr lang="ko-KR" altLang="en-US"/>
           </a:p>
@@ -6321,7 +6348,7 @@
           <a:p>
             <a:fld id="{76022175-F16A-4A96-8E45-178BE9345AE9}" type="datetime6">
               <a:rPr lang="ko-KR" altLang="en-US" smtClean="0"/>
-              <a:t>2025년 7월</a:t>
+              <a:t>2025년 8월</a:t>
             </a:fld>
             <a:endParaRPr lang="ko-KR" altLang="en-US"/>
           </a:p>
@@ -6706,7 +6733,7 @@
           <a:p>
             <a:fld id="{0F78D9C4-20C1-4B15-A116-16DC77AD9A1E}" type="datetime1">
               <a:rPr lang="ko-KR" altLang="en-US" smtClean="0"/>
-              <a:t>2025-07-14</a:t>
+              <a:t>2025-08-21</a:t>
             </a:fld>
             <a:endParaRPr lang="ko-KR" altLang="en-US"/>
           </a:p>
@@ -7109,7 +7136,7 @@
           <a:p>
             <a:fld id="{0F78D9C4-20C1-4B15-A116-16DC77AD9A1E}" type="datetime1">
               <a:rPr lang="ko-KR" altLang="en-US" smtClean="0"/>
-              <a:t>2025-07-14</a:t>
+              <a:t>2025-08-21</a:t>
             </a:fld>
             <a:endParaRPr lang="ko-KR" altLang="en-US"/>
           </a:p>
@@ -7368,7 +7395,7 @@
           <a:p>
             <a:fld id="{0F78D9C4-20C1-4B15-A116-16DC77AD9A1E}" type="datetime1">
               <a:rPr lang="ko-KR" altLang="en-US" smtClean="0"/>
-              <a:t>2025-07-14</a:t>
+              <a:t>2025-08-21</a:t>
             </a:fld>
             <a:endParaRPr lang="ko-KR" altLang="en-US"/>
           </a:p>
@@ -7687,7 +7714,7 @@
           <a:p>
             <a:fld id="{0F78D9C4-20C1-4B15-A116-16DC77AD9A1E}" type="datetime1">
               <a:rPr lang="ko-KR" altLang="en-US" smtClean="0"/>
-              <a:t>2025-07-14</a:t>
+              <a:t>2025-08-21</a:t>
             </a:fld>
             <a:endParaRPr lang="ko-KR" altLang="en-US"/>
           </a:p>
@@ -7983,7 +8010,7 @@
           <a:p>
             <a:fld id="{0F78D9C4-20C1-4B15-A116-16DC77AD9A1E}" type="datetime1">
               <a:rPr lang="ko-KR" altLang="en-US" smtClean="0"/>
-              <a:t>2025-07-14</a:t>
+              <a:t>2025-08-21</a:t>
             </a:fld>
             <a:endParaRPr lang="ko-KR" altLang="en-US"/>
           </a:p>
@@ -8397,7 +8424,7 @@
           <a:p>
             <a:fld id="{0F78D9C4-20C1-4B15-A116-16DC77AD9A1E}" type="datetime1">
               <a:rPr lang="ko-KR" altLang="en-US" smtClean="0"/>
-              <a:t>2025-07-14</a:t>
+              <a:t>2025-08-21</a:t>
             </a:fld>
             <a:endParaRPr lang="ko-KR" altLang="en-US"/>
           </a:p>
@@ -10599,7 +10626,7 @@
           <a:p>
             <a:fld id="{0F78D9C4-20C1-4B15-A116-16DC77AD9A1E}" type="datetime1">
               <a:rPr lang="ko-KR" altLang="en-US" smtClean="0"/>
-              <a:t>2025-07-14</a:t>
+              <a:t>2025-08-21</a:t>
             </a:fld>
             <a:endParaRPr lang="ko-KR" altLang="en-US"/>
           </a:p>
@@ -10973,7 +11000,7 @@
           <a:p>
             <a:fld id="{0F78D9C4-20C1-4B15-A116-16DC77AD9A1E}" type="datetime1">
               <a:rPr lang="ko-KR" altLang="en-US" smtClean="0"/>
-              <a:t>2025-07-14</a:t>
+              <a:t>2025-08-21</a:t>
             </a:fld>
             <a:endParaRPr lang="ko-KR" altLang="en-US"/>
           </a:p>
@@ -12773,7 +12800,7 @@
           <a:p>
             <a:fld id="{0F78D9C4-20C1-4B15-A116-16DC77AD9A1E}" type="datetime1">
               <a:rPr lang="ko-KR" altLang="en-US" smtClean="0"/>
-              <a:t>2025-07-14</a:t>
+              <a:t>2025-08-21</a:t>
             </a:fld>
             <a:endParaRPr lang="ko-KR" altLang="en-US"/>
           </a:p>
@@ -13378,7 +13405,7 @@
           <a:p>
             <a:fld id="{0F78D9C4-20C1-4B15-A116-16DC77AD9A1E}" type="datetime1">
               <a:rPr lang="ko-KR" altLang="en-US" smtClean="0"/>
-              <a:t>2025-07-14</a:t>
+              <a:t>2025-08-21</a:t>
             </a:fld>
             <a:endParaRPr lang="ko-KR" altLang="en-US"/>
           </a:p>
@@ -15349,7 +15376,7 @@
           <a:p>
             <a:fld id="{0F78D9C4-20C1-4B15-A116-16DC77AD9A1E}" type="datetime1">
               <a:rPr lang="ko-KR" altLang="en-US" smtClean="0"/>
-              <a:t>2025-07-14</a:t>
+              <a:t>2025-08-21</a:t>
             </a:fld>
             <a:endParaRPr lang="ko-KR" altLang="en-US"/>
           </a:p>
